--- a/assets/pptx/catalog-48.pptx
+++ b/assets/pptx/catalog-48.pptx
@@ -3996,7 +3996,7 @@
                 <a:ea typeface="Ebrima"/>
                 <a:cs typeface="Ebrima"/>
               </a:rPr>
-              <a:t>ከአንተ የተነሳ ነው (2x) ለሚያየኝ በእራሴ ብቁ ሰው እመስላለሁ ለሚያየኝ በእራሴ ብቁ ሰው እመስላለሁ</a:t>
+              <a:t>ከአንተ የተነሳ ነው 2x ለሚያየኝ በእራሴ ብቁ ሰው እመስላለሁ ለሚያየኝ በእራሴ ብቁ ሰው እመስላለሁ</a:t>
             </a:r>
           </a:p>
         </p:txBody>
@@ -4331,7 +4331,7 @@
                 <a:ea typeface="Ebrima"/>
                 <a:cs typeface="Ebrima"/>
               </a:rPr>
-              <a:t>(2x)</a:t>
+              <a:t>2x</a:t>
             </a:r>
           </a:p>
         </p:txBody>
